--- a/chaingammon.pptx
+++ b/chaingammon.pptx
@@ -3259,7 +3259,7 @@
                   <a:srgbClr val="00D4AA"/>
                 </a:solidFill>
               </a:rPr>
-              <a:t>An open protocol for portable backgammon reputation</a:t>
+              <a:t>5,000 years of strategy. Finally, a permanent record.</a:t>
             </a:r>
           </a:p>
         </p:txBody>
@@ -10413,8 +10413,8 @@
                   <a:srgbClr val="FFFFFF"/>
                 </a:solidFill>
               </a:rPr>
-              <a:t>Centralised game ratings
-(Backgammon Galaxy, Chess.com)</a:t>
+              <a:t>Decentralised game ratings
+(on-chain ELO, ENS subnames)</a:t>
             </a:r>
           </a:p>
         </p:txBody>
@@ -11074,7 +11074,7 @@
                   <a:srgbClr val="FFFFFF"/>
                 </a:solidFill>
               </a:rPr>
-              <a:t>▸ Oldest recorded board game — 5,000+ year history, global player base</a:t>
+              <a:t>▸ One of humanity’s oldest games — traced to ancient Mesopotamia, played continuously for 5,000 years across Persian, Roman, and Ottoman empires</a:t>
             </a:r>
           </a:p>
           <a:p>
@@ -11089,7 +11089,7 @@
                   <a:srgbClr val="FFFFFF"/>
                 </a:solidFill>
               </a:rPr>
-              <a:t>▸ ELO is well-understood and already used on every major platform</a:t>
+              <a:t>▸ Never needed a central authority to stay alive — until the internet put it inside platform silos</a:t>
             </a:r>
           </a:p>
           <a:p>
@@ -11104,7 +11104,7 @@
                   <a:srgbClr val="FFFFFF"/>
                 </a:solidFill>
               </a:rPr>
-              <a:t>▸ gnubg: open-source world-class AI engine — a ready benchmark</a:t>
+              <a:t>▸ The rules haven’t changed; the infrastructure should finally catch up</a:t>
             </a:r>
           </a:p>
           <a:p>
@@ -11119,7 +11119,7 @@
                   <a:srgbClr val="FFFFFF"/>
                 </a:solidFill>
               </a:rPr>
-              <a:t>▸ Skill gap between humans and AI is measurable, auditable, and meaningful</a:t>
+              <a:t>▸ ELO already used on every platform — portable ratings are the natural next step</a:t>
             </a:r>
           </a:p>
           <a:p>
@@ -11134,7 +11134,7 @@
                   <a:srgbClr val="FFFFFF"/>
                 </a:solidFill>
               </a:rPr>
-              <a:t>▸ Small, well-defined state space: every position is reproducible from dice + moves</a:t>
+              <a:t>▸ gnubg gives a world-class AI baseline: human vs. machine skill gaps are measurable and auditable</a:t>
             </a:r>
           </a:p>
         </p:txBody>
@@ -12051,10 +12051,8 @@
                   <a:srgbClr val="AAAABB"/>
                 </a:solidFill>
               </a:rPr>
-              <a:t>KeeperHub workflow:
-recordMatch + ENS text
-records + overlay update +
-verifiable audit trail.</a:t>
+              <a:t>Each result is cryptographically committed: the full move-by-move archive is hashed and tied permanently to an on-chain record. Your rating reflects every game you actually played.
+KeeperHub orchestrates: recordMatch → ENS update → overlay hash → public audit trail.</a:t>
             </a:r>
           </a:p>
         </p:txBody>

--- a/chaingammon.pptx
+++ b/chaingammon.pptx
@@ -6046,7 +6046,7 @@
                 </a:solidFill>
                 <a:latin typeface="Calibri"/>
               </a:rPr>
-              <a:t>Shared across ALL agents — encrypted gnubg</a:t>
+              <a:t>gnubg-initialised starter weights —</a:t>
             </a:r>
             <a:endParaRPr b="0" lang="en-US" sz="1200" spc="-1" strike="noStrike">
               <a:solidFill>
@@ -6068,7 +6068,7 @@
                 </a:solidFill>
                 <a:latin typeface="Calibri"/>
               </a:rPr>
-              <a:t>neural-network weights on 0G Storage.</a:t>
+              <a:t>feedforward NN (Tesauro encoding) on 0G Storage.</a:t>
             </a:r>
             <a:endParaRPr b="0" lang="en-US" sz="1200" spc="-1" strike="noStrike">
               <a:solidFill>
@@ -6090,7 +6090,7 @@
                 </a:solidFill>
                 <a:latin typeface="Calibri"/>
               </a:rPr>
-              <a:t>Verifies: 'this agent runs real gnubg.'</a:t>
+              <a:t>Same starting point for every agent.</a:t>
             </a:r>
             <a:endParaRPr b="0" lang="en-US" sz="1200" spc="-1" strike="noStrike">
               <a:solidFill>
@@ -6258,7 +6258,7 @@
                 </a:solidFill>
                 <a:latin typeface="Calibri"/>
               </a:rPr>
-              <a:t>overlayHash</a:t>
+              <a:t>checkpointHash</a:t>
             </a:r>
             <a:endParaRPr b="0" lang="en-US" sz="1400" spc="-1" strike="noStrike">
               <a:solidFill>
@@ -6311,7 +6311,7 @@
                 </a:solidFill>
                 <a:latin typeface="Calibri"/>
               </a:rPr>
-              <a:t>Per-agent experience overlay — a ~20-float</a:t>
+              <a:t>Per-agent trained NN checkpoint</a:t>
             </a:r>
             <a:endParaRPr b="0" lang="en-US" sz="1200" spc="-1" strike="noStrike">
               <a:solidFill>
@@ -6333,7 +6333,7 @@
                 </a:solidFill>
                 <a:latin typeface="Calibri"/>
               </a:rPr>
-              <a:t>vector that biases move selection and grows</a:t>
+              <a:t>(~10K params, TD-λ self-play); rewritten</a:t>
             </a:r>
             <a:endParaRPr b="0" lang="en-US" sz="1200" spc="-1" strike="noStrike">
               <a:solidFill>
@@ -6355,7 +6355,7 @@
                 </a:solidFill>
                 <a:latin typeface="Calibri"/>
               </a:rPr>
-              <a:t>with every match played.</a:t>
+              <a:t>after every refereed match.</a:t>
             </a:r>
             <a:endParaRPr b="0" lang="en-US" sz="1200" spc="-1" strike="noStrike">
               <a:solidFill>
@@ -7475,7 +7475,7 @@
                 </a:solidFill>
                 <a:latin typeface="Arial"/>
               </a:rPr>
-              <a:t>GNUBG AGENT LEARNING</a:t>
+              <a:t>PER-AGENT VALUE-NET LEARNING</a:t>
             </a:r>
             <a:endParaRPr b="0" lang="en-US" sz="1100" spc="-1" strike="noStrike">
               <a:solidFill>
@@ -7528,7 +7528,7 @@
                 </a:solidFill>
                 <a:latin typeface="Arial"/>
               </a:rPr>
-              <a:t>Neural-network position evaluation + per-agent bias vector + look-ahead depth = a unique, evolving player</a:t>
+              <a:t>Neural-network position evaluation + TD-λ self-play training + look-ahead depth = a unique, evolving player</a:t>
             </a:r>
             <a:endParaRPr b="0" lang="en-US" sz="1300" spc="-1" strike="noStrike">
               <a:solidFill>
@@ -7799,7 +7799,7 @@
                 </a:solidFill>
                 <a:latin typeface="Arial"/>
               </a:rPr>
-              <a:t>Experience Overlay (bias vector)</a:t>
+              <a:t>Career Context (style biases)</a:t>
             </a:r>
             <a:endParaRPr b="0" lang="en-US" sz="1200" spc="-1" strike="noStrike">
               <a:solidFill>
@@ -9396,7 +9396,7 @@
                 </a:solidFill>
                 <a:latin typeface="Arial"/>
               </a:rPr>
-              <a:t>Base case — overlay = 0</a:t>
+              <a:t>Base case — untrained NN</a:t>
             </a:r>
             <a:endParaRPr b="0" lang="en-US" sz="900" spc="-1" strike="noStrike">
               <a:solidFill>
@@ -9418,7 +9418,7 @@
                 </a:solidFill>
                 <a:latin typeface="Arial"/>
               </a:rPr>
-              <a:t>All 20 bias values = 0.0</a:t>
+              <a:t>Init from gnubg's published weights</a:t>
             </a:r>
             <a:endParaRPr b="0" lang="en-US" sz="800" spc="-1" strike="noStrike">
               <a:solidFill>
@@ -9524,7 +9524,7 @@
                 </a:solidFill>
                 <a:latin typeface="Arial"/>
               </a:rPr>
-              <a:t>20-float per-agent style bias — stored on 0G Storage:</a:t>
+              <a:t>Per-agent style biases (illustrative; the actual extras head is 16-d):</a:t>
             </a:r>
             <a:endParaRPr b="0" lang="en-US" sz="900" spc="-1" strike="noStrike">
               <a:solidFill>
@@ -11597,7 +11597,7 @@
                 </a:solidFill>
                 <a:latin typeface="Arial"/>
               </a:rPr>
-              <a:t>Post-match update rule:</a:t>
+              <a:t>Post-match update rule (TD-λ):</a:t>
             </a:r>
             <a:endParaRPr b="0" lang="en-US" sz="900" spc="-1" strike="noStrike">
               <a:solidFill>
@@ -11619,7 +11619,7 @@
                 </a:solidFill>
                 <a:latin typeface="Arial"/>
               </a:rPr>
-              <a:t>Δ[c] = lr × outcome × exposure[c]</a:t>
+              <a:t>θ ← θ + α · δ_t · e_t</a:t>
             </a:r>
             <a:endParaRPr b="0" lang="en-US" sz="900" spc="-1" strike="noStrike">
               <a:solidFill>
@@ -11641,7 +11641,7 @@
                 </a:solidFill>
                 <a:latin typeface="Arial"/>
               </a:rPr>
-              <a:t>α = N / (N + matches)  →  early games learn faster</a:t>
+              <a:t>δ_t = r_{t+1} + γ · V(s_{t+1}; θ) − V(s_t; θ)</a:t>
             </a:r>
             <a:endParaRPr b="0" lang="en-US" sz="800" spc="-1" strike="noStrike">
               <a:solidFill>
@@ -11663,7 +11663,7 @@
                 </a:solidFill>
                 <a:latin typeface="Arial"/>
               </a:rPr>
-              <a:t>new[c] = clip((1−α)·old + α·(old+Δ),  −1, +1)</a:t>
+              <a:t>e_t = γλ · e_{t−1} + ∇_θ V(s_t; θ)</a:t>
             </a:r>
             <a:endParaRPr b="0" lang="en-US" sz="800" spc="-1" strike="noStrike">
               <a:solidFill>
@@ -13136,7 +13136,7 @@
                 </a:solidFill>
                 <a:latin typeface="Arial"/>
               </a:rPr>
-              <a:t>score(move)  =  gnubg_equity(board_after_move)  +  Σc [ overlay[c] × category_match(move, c) ]     →   argmax selects the move played</a:t>
+              <a:t>score(move)  =  V(board_after_move; θ)     →   argmax over legal successors selects the move played</a:t>
             </a:r>
             <a:endParaRPr b="0" lang="en-US" sz="1100" spc="-1" strike="noStrike">
               <a:solidFill>
@@ -15458,7 +15458,7 @@
                 </a:solidFill>
                 <a:latin typeface="Calibri"/>
               </a:rPr>
-              <a:t>SMART CONTRACTS ON 0G CHAIN  (chainId 16602)</a:t>
+              <a:t>SMART CONTRACTS ON SEPOLIA  (chainId 11155111)</a:t>
             </a:r>
             <a:endParaRPr b="0" lang="en-US" sz="1100" spc="-1" strike="noStrike">
               <a:solidFill>
@@ -15511,7 +15511,7 @@
                 </a:solidFill>
                 <a:latin typeface="Calibri"/>
               </a:rPr>
-              <a:t>Four contracts — deployed and verified on chainscan-galileo</a:t>
+              <a:t>Five contracts — Sepolia (canonical settlement) + 0G testnet (cross-chain demo)</a:t>
             </a:r>
             <a:endParaRPr b="0" lang="en-US" sz="2600" spc="-1" strike="noStrike">
               <a:solidFill>
@@ -15685,7 +15685,7 @@
                 </a:solidFill>
                 <a:latin typeface="Calibri"/>
               </a:rPr>
-              <a:t>EloMath.sol</a:t>
+              <a:t>MatchEscrow.sol</a:t>
             </a:r>
             <a:endParaRPr b="0" lang="en-US" sz="1500" spc="-1" strike="noStrike">
               <a:solidFill>
@@ -15738,7 +15738,7 @@
                 </a:solidFill>
                 <a:latin typeface="Calibri"/>
               </a:rPr>
-              <a:t>Pure library. K=32, INITIAL=1500 ELO.</a:t>
+              <a:t>Per-side stake deposits + atomic payout.</a:t>
             </a:r>
             <a:endParaRPr b="0" lang="en-US" sz="1200" spc="-1" strike="noStrike">
               <a:solidFill>
@@ -15760,7 +15760,7 @@
                 </a:solidFill>
                 <a:latin typeface="Calibri"/>
               </a:rPr>
-              <a:t>Fixed-point integer math — no floats on-chain.</a:t>
+              <a:t>deposit / refund / payoutSplit (N-way for team mode).</a:t>
             </a:r>
             <a:endParaRPr b="0" lang="en-US" sz="1200" spc="-1" strike="noStrike">
               <a:solidFill>
@@ -15782,7 +15782,7 @@
                 </a:solidFill>
                 <a:latin typeface="Calibri"/>
               </a:rPr>
-              <a:t>Expected-score lookup table, floor at 0.</a:t>
+              <a:t>Settler-only payout, atomic with MatchRegistry.recordMatchAndSplit.</a:t>
             </a:r>
             <a:endParaRPr b="0" lang="en-US" sz="1200" spc="-1" strike="noStrike">
               <a:solidFill>
@@ -16009,7 +16009,7 @@
                 </a:solidFill>
                 <a:latin typeface="Calibri"/>
               </a:rPr>
-              <a:t>Owner-only recordMatch(winner, loser, matchLength, gameRecordHash).</a:t>
+              <a:t>recordMatch + recordMatchAndSplit (atomic) + settleWithSessionKeys.</a:t>
             </a:r>
             <a:endParaRPr b="0" lang="en-US" sz="1200" spc="-1" strike="noStrike">
               <a:solidFill>
@@ -16031,7 +16031,7 @@
                 </a:solidFill>
                 <a:latin typeface="Calibri"/>
               </a:rPr>
-              <a:t>Stores MatchInfo struct with on-chain ↔ 0G Storage link.</a:t>
+              <a:t>Stores MatchInfo struct with on-chain ↔ 0G Storage link via gameRecordHash.</a:t>
             </a:r>
             <a:endParaRPr b="0" lang="en-US" sz="1200" spc="-1" strike="noStrike">
               <a:solidFill>
@@ -16053,7 +16053,7 @@
                 </a:solidFill>
                 <a:latin typeface="Calibri"/>
               </a:rPr>
-              <a:t>Emits MatchRecorded, EloUpdated, GameRecordStored events.</a:t>
+              <a:t>EloMath library inside; emits MatchRecorded + EloUpdated events.</a:t>
             </a:r>
             <a:endParaRPr b="0" lang="en-US" sz="1200" spc="-1" strike="noStrike">
               <a:solidFill>
@@ -16573,7 +16573,7 @@
                 </a:solidFill>
                 <a:latin typeface="Calibri"/>
               </a:rPr>
-              <a:t>Server-only write access in v1.</a:t>
+              <a:t>ENS NameWrapper subnames on Sepolia.</a:t>
             </a:r>
             <a:endParaRPr b="0" lang="en-US" sz="1200" spc="-1" strike="noStrike">
               <a:solidFill>
@@ -16595,7 +16595,7 @@
                 </a:solidFill>
                 <a:latin typeface="Calibri"/>
               </a:rPr>
-              <a:t>Controls text records: elo, match_count, style_uri, archive_uri.</a:t>
+              <a:t>5 reserved text records: elo, match_count, last_match_id, kind, inft_id.</a:t>
             </a:r>
             <a:endParaRPr b="0" lang="en-US" sz="1200" spc="-1" strike="noStrike">
               <a:solidFill>
@@ -17793,7 +17793,7 @@
                 </a:solidFill>
                 <a:latin typeface="Calibri"/>
               </a:rPr>
-              <a:t>gnubg base weights</a:t>
+              <a:t>gnubg starter weights</a:t>
             </a:r>
             <a:endParaRPr b="0" lang="en-US" sz="1400" spc="-1" strike="noStrike">
               <a:solidFill>
@@ -17846,7 +17846,7 @@
                 </a:solidFill>
                 <a:latin typeface="Calibri"/>
               </a:rPr>
-              <a:t>Encrypted (AES-256-GCM). ~408 KB. One blob for all agents. rootHash is dataHashes[0] on every iNFT. Key held server-side in v1.</a:t>
+              <a:t>AES-256-GCM (opt-in). ~408 KB. Same starting point for all agents. rootHash is dataHashes[0] on every iNFT.</a:t>
             </a:r>
             <a:endParaRPr b="0" lang="en-US" sz="1200" spc="-1" strike="noStrike">
               <a:solidFill>
@@ -18070,7 +18070,7 @@
                 </a:solidFill>
                 <a:latin typeface="Calibri"/>
               </a:rPr>
-              <a:t>Experience overlay</a:t>
+              <a:t>Trained checkpoint</a:t>
             </a:r>
             <a:endParaRPr b="0" lang="en-US" sz="1400" spc="-1" strike="noStrike">
               <a:solidFill>
@@ -18123,7 +18123,7 @@
                 </a:solidFill>
                 <a:latin typeface="Calibri"/>
               </a:rPr>
-              <a:t>~20-float preference vector. Updates after every match. rootHash is dataHashes[1] on the iNFT. Grows with play.</a:t>
+              <a:t>Full per-agent NN weights (~10K params). Updates after every match (TD-λ). rootHash is dataHashes[1] on the iNFT.</a:t>
             </a:r>
             <a:endParaRPr b="0" lang="en-US" sz="1200" spc="-1" strike="noStrike">
               <a:solidFill>
@@ -18611,7 +18611,7 @@
                 </a:solidFill>
                 <a:latin typeface="Calibri"/>
               </a:rPr>
-              <a:t>recordMatch</a:t>
+              <a:t>recordMatchAndSplit</a:t>
             </a:r>
             <a:endParaRPr b="0" lang="en-US" sz="1500" spc="-1" strike="noStrike">
               <a:solidFill>
@@ -18664,7 +18664,7 @@
                 </a:solidFill>
                 <a:latin typeface="Calibri"/>
               </a:rPr>
-              <a:t>MatchRegistry.recordMatch(</a:t>
+              <a:t>MatchRegistry.recordMatchAndSplit(</a:t>
             </a:r>
             <a:endParaRPr b="0" lang="en-US" sz="1200" spc="-1" strike="noStrike">
               <a:solidFill>
@@ -18695,7 +18695,7 @@
                 </a:solidFill>
                 <a:latin typeface="Calibri"/>
               </a:rPr>
-              <a:t>winner, loser, matchLength,</a:t>
+              <a:t>...recordMatch args,</a:t>
             </a:r>
             <a:endParaRPr b="0" lang="en-US" sz="1200" spc="-1" strike="noStrike">
               <a:solidFill>
@@ -18726,7 +18726,7 @@
                 </a:solidFill>
                 <a:latin typeface="Calibri"/>
               </a:rPr>
-              <a:t>gameRecordHash</a:t>
+              <a:t>winners[], shares[]</a:t>
             </a:r>
             <a:endParaRPr b="0" lang="en-US" sz="1200" spc="-1" strike="noStrike">
               <a:solidFill>
@@ -18770,7 +18770,7 @@
                 </a:solidFill>
                 <a:latin typeface="Calibri"/>
               </a:rPr>
-              <a:t>Returns matchId; ELO updated on-chain.</a:t>
+              <a:t>Atomic settle + payout on Sepolia.</a:t>
             </a:r>
             <a:endParaRPr b="0" lang="en-US" sz="1200" spc="-1" strike="noStrike">
               <a:solidFill>
@@ -19165,7 +19165,7 @@
                 </a:solidFill>
                 <a:latin typeface="Calibri"/>
               </a:rPr>
-              <a:t>last_match_id, archive_uri)</a:t>
+              <a:t>last_match_id, kind, inft_id)</a:t>
             </a:r>
             <a:endParaRPr b="0" lang="en-US" sz="1200" spc="-1" strike="noStrike">
               <a:solidFill>
@@ -19467,7 +19467,7 @@
                 </a:solidFill>
                 <a:latin typeface="Calibri"/>
               </a:rPr>
-              <a:t>Overlay update</a:t>
+              <a:t>Checkpoint update</a:t>
             </a:r>
             <a:endParaRPr b="0" lang="en-US" sz="1500" spc="-1" strike="noStrike">
               <a:solidFill>
@@ -19551,7 +19551,7 @@
                 </a:solidFill>
                 <a:latin typeface="Calibri"/>
               </a:rPr>
-              <a:t>agentId, newOverlayHash</a:t>
+              <a:t>agentId, newCheckpointHash</a:t>
             </a:r>
             <a:endParaRPr b="0" lang="en-US" sz="1200" spc="-1" strike="noStrike">
               <a:solidFill>
@@ -20069,7 +20069,7 @@
                 </a:solidFill>
                 <a:latin typeface="Calibri"/>
               </a:rPr>
-              <a:t>Server calls POST /trigger → KeeperHub runs all 4 steps → pulls audit → mirrors to 0G Storage.</a:t>
+              <a:t>Event-driven (both MatchEscrow.Deposited) → KeeperHub runs 7 steps → atomic recordMatchAndSplit on Sepolia → audit to 0G Storage.</a:t>
             </a:r>
             <a:endParaRPr b="0" lang="en-US" sz="1400" spc="-1" strike="noStrike">
               <a:solidFill>
@@ -20377,7 +20377,7 @@
                 </a:solidFill>
                 <a:latin typeface="Calibri"/>
               </a:rPr>
-              <a:t>0G Chain testnet · chainId 16602 · evmRPC + chainscan-galileo explorer</a:t>
+              <a:t>Sepolia (chainId 11155111, canonical settlement) · 0G testnet (chainId 16602) for cross-chain demos · drand BLS12-381 dice VRF</a:t>
             </a:r>
             <a:endParaRPr b="0" lang="en-US" sz="1300" spc="-1" strike="noStrike">
               <a:solidFill>
@@ -20589,7 +20589,7 @@
                 </a:solidFill>
                 <a:latin typeface="Calibri"/>
               </a:rPr>
-              <a:t>Python 3.12 · FastAPI · uvicorn · pydantic · web3.py</a:t>
+              <a:t>Python 3.12 · FastAPI · uvicorn · pydantic · web3.py · drand-derived dice</a:t>
             </a:r>
             <a:endParaRPr b="0" lang="en-US" sz="1300" spc="-1" strike="noStrike">
               <a:solidFill>
@@ -20695,7 +20695,7 @@
                 </a:solidFill>
                 <a:latin typeface="Calibri"/>
               </a:rPr>
-              <a:t>GNU Backgammon (gnubg) via External Player socket interface</a:t>
+              <a:t>Per-agent value net (PyTorch, TD-λ self-play, gnubg-initialised); gnubg only for audit replay + baseline-strength check</a:t>
             </a:r>
             <a:endParaRPr b="0" lang="en-US" sz="1300" spc="-1" strike="noStrike">
               <a:solidFill>
@@ -20801,7 +20801,7 @@
                 </a:solidFill>
                 <a:latin typeface="Calibri"/>
               </a:rPr>
-              <a:t>Node.js workspace package (og-bridge) · @0gfoundation/0g-ts-sdk · ethers</a:t>
+              <a:t>og-bridge (Storage) + og-compute-bridge (Compute) · @0glabs/0g-ts-sdk · @0glabs/0g-serving-broker · ethers v6</a:t>
             </a:r>
             <a:endParaRPr b="0" lang="en-US" sz="1300" spc="-1" strike="noStrike">
               <a:solidFill>
@@ -20907,7 +20907,7 @@
                 </a:solidFill>
                 <a:latin typeface="Calibri"/>
               </a:rPr>
-              <a:t>ENS subnames · text records (elo, match_count, style_uri, archive_uri)</a:t>
+              <a:t>ENS subnames via NameWrapper (Sepolia) · 5 reserved text records (elo, match_count, last_match_id, kind, inft_id)</a:t>
             </a:r>
             <a:endParaRPr b="0" lang="en-US" sz="1300" spc="-1" strike="noStrike">
               <a:solidFill>
@@ -21013,7 +21013,7 @@
                 </a:solidFill>
                 <a:latin typeface="Calibri"/>
               </a:rPr>
-              <a:t>KeeperHub workflows · kh CLI · HTTP trigger API</a:t>
+              <a:t>KeeperHub event-driven workflows · kh CLI · MatchEscrow.Deposited triggers · 0G Storage audit mirror</a:t>
             </a:r>
             <a:endParaRPr b="0" lang="en-US" sz="1300" spc="-1" strike="noStrike">
               <a:solidFill>
@@ -21225,7 +21225,7 @@
                 </a:solidFill>
                 <a:latin typeface="Calibri"/>
               </a:rPr>
-              <a:t>82 server tests (pytest) · 52 contract tests (Hardhat/Mocha) · TDD throughout</a:t>
+              <a:t>305 server + 300 agent (pytest) · 200 contract (Hardhat) · 21 Playwright e2e specs · TDD throughout</a:t>
             </a:r>
             <a:endParaRPr b="0" lang="en-US" sz="1300" spc="-1" strike="noStrike">
               <a:solidFill>
@@ -21554,7 +21554,7 @@
                 </a:solidFill>
                 <a:latin typeface="Calibri"/>
               </a:rPr>
-              <a:t>Each AI agent IS an ERC-7857 iNFT minted on 0G Chain — the token itself, not a label pointing at an off-chain model. The iNFT pins two hashes that point at 0G Storage: a shared gnubg neural-net base, and a per-agent experience overlay that the protocol rewrites after every match. The iNFT learns. Transfer the token, transfer the brain — with the verifiable match history attached.</a:t>
+              <a:t>Each AI agent IS an ERC-7857 iNFT minted on 0G Chain (and Sepolia for settlement) — the token itself, not a label pointing at an off-chain model. The iNFT pins two hashes that point at 0G Storage: starter weights (gnubg-initialised) and a per-agent trained checkpoint that the protocol rewrites after every match (TD-λ self-play). The iNFT learns. Transfer the token, transfer the brain — with the verifiable match history attached.</a:t>
             </a:r>
             <a:endParaRPr b="0" lang="en-US" sz="1300" spc="-1" strike="noStrike">
               <a:solidFill>
@@ -21883,7 +21883,7 @@
                 </a:solidFill>
                 <a:latin typeface="Calibri"/>
               </a:rPr>
-              <a:t>Each AI agent IS an ERC-7857 iNFT minted on 0G Chain — the token itself, not a label pointing at an off-chain model. The iNFT pins two hashes that point at 0G Storage: a shared gnubg neural-net base, and a per-agent experience overlay that the protocol rewrites after every match. The iNFT learns. Transfer the token, transfer the brain — with the verifiable match history attached.</a:t>
+              <a:t>Each AI agent IS an ERC-7857 iNFT minted on 0G Chain (and Sepolia for settlement) — the token itself, not a label pointing at an off-chain model. The iNFT pins two hashes that point at 0G Storage: starter weights (gnubg-initialised) and a per-agent trained checkpoint that the protocol rewrites after every match (TD-λ self-play). The iNFT learns. Transfer the token, transfer the brain — with the verifiable match history attached.</a:t>
             </a:r>
             <a:endParaRPr b="0" lang="en-US" sz="1500" spc="-1" strike="noStrike">
               <a:solidFill>
@@ -26441,7 +26441,7 @@
                 </a:solidFill>
                 <a:latin typeface="Calibri"/>
               </a:rPr>
-              <a:t>carries ELO, match count,</a:t>
+              <a:t>carries ELO, match count, last_match_id,</a:t>
             </a:r>
             <a:endParaRPr b="0" lang="en-US" sz="1400" spc="-1" strike="noStrike">
               <a:solidFill>
@@ -26463,7 +26463,7 @@
                 </a:solidFill>
                 <a:latin typeface="Calibri"/>
               </a:rPr>
-              <a:t>style URI, archive URI</a:t>
+              <a:t>kind, iNFT id</a:t>
             </a:r>
             <a:endParaRPr b="0" lang="en-US" sz="1400" spc="-1" strike="noStrike">
               <a:solidFill>
@@ -26699,7 +26699,7 @@
                 </a:solidFill>
                 <a:latin typeface="Calibri"/>
               </a:rPr>
-              <a:t>ERC-7857 iNFT on 0G Chain.</a:t>
+              <a:t>ERC-7857 iNFT (Sepolia + 0G testnet).</a:t>
             </a:r>
             <a:endParaRPr b="0" lang="en-US" sz="1400" spc="-1" strike="noStrike">
               <a:solidFill>
@@ -26721,7 +26721,7 @@
                 </a:solidFill>
                 <a:latin typeface="Calibri"/>
               </a:rPr>
-              <a:t>Encrypted gnubg weights +</a:t>
+              <a:t>Per-agent NN: gnubg starter +</a:t>
             </a:r>
             <a:endParaRPr b="0" lang="en-US" sz="1400" spc="-1" strike="noStrike">
               <a:solidFill>
@@ -26743,7 +26743,7 @@
                 </a:solidFill>
                 <a:latin typeface="Calibri"/>
               </a:rPr>
-              <a:t>learned experience overlay,</a:t>
+              <a:t>trained checkpoint (TD-λ),</a:t>
             </a:r>
             <a:endParaRPr b="0" lang="en-US" sz="1400" spc="-1" strike="noStrike">
               <a:solidFill>
@@ -27045,7 +27045,7 @@
                 </a:solidFill>
                 <a:latin typeface="Calibri"/>
               </a:rPr>
-              <a:t>KeeperHub orchestrates: recordMatch → ENS update → overlay hash → audit trail.</a:t>
+              <a:t>KeeperHub orchestrates: recordMatchAndSplit → ENS update → checkpoint hash → audit trail.</a:t>
             </a:r>
             <a:endParaRPr b="0" lang="en-US" sz="1200" spc="-1" strike="noStrike">
               <a:solidFill>
@@ -27791,7 +27791,7 @@
                 </a:solidFill>
                 <a:latin typeface="Calibri"/>
               </a:rPr>
-              <a:t>Server rolls dice; gnubg weights pulled from 0G Storage, run server-side per turn</a:t>
+              <a:t>Drand round → dice (keccak256 mod 36); per-agent NN runs in browser (or 0G Compute when offline)</a:t>
             </a:r>
             <a:endParaRPr b="0" lang="en-US" sz="1200" spc="-1" strike="noStrike">
               <a:solidFill>
@@ -28139,7 +28139,7 @@
                 </a:solidFill>
                 <a:latin typeface="Calibri"/>
               </a:rPr>
-              <a:t>recordMatch on-chain (with rootHash) + ENS text records updated + agent overlay refreshed</a:t>
+              <a:t>settleWithSessionKeys / recordMatchAndSplit on Sepolia + ENS text records updated + agent checkpoint hash refreshed</a:t>
             </a:r>
             <a:endParaRPr b="0" lang="en-US" sz="1200" spc="-1" strike="noStrike">
               <a:solidFill>
@@ -29774,7 +29774,7 @@
                 </a:solidFill>
                 <a:latin typeface="Calibri"/>
               </a:rPr>
-              <a:t>style_uri</a:t>
+              <a:t>kind</a:t>
             </a:r>
             <a:endParaRPr b="0" lang="en-US" sz="1200" spc="-1" strike="noStrike">
               <a:solidFill>
@@ -29827,7 +29827,7 @@
                 </a:solidFill>
                 <a:latin typeface="Calibri"/>
               </a:rPr>
-              <a:t>0g://kv/alice/style</a:t>
+              <a:t>agent</a:t>
             </a:r>
             <a:endParaRPr b="0" lang="en-US" sz="1200" spc="-1" strike="noStrike">
               <a:solidFill>
@@ -29880,7 +29880,7 @@
                 </a:solidFill>
                 <a:latin typeface="Calibri"/>
               </a:rPr>
-              <a:t>Link to 0G KV style profile (opening tendencies, cube aggression)</a:t>
+              <a:t>Identity discriminator: 'human' or 'agent' — set at creation, never changes</a:t>
             </a:r>
             <a:endParaRPr b="0" lang="en-US" sz="1050" spc="-1" strike="noStrike">
               <a:solidFill>
@@ -29992,7 +29992,7 @@
                 </a:solidFill>
                 <a:latin typeface="Calibri"/>
               </a:rPr>
-              <a:t>archive_uri</a:t>
+              <a:t>inft_id</a:t>
             </a:r>
             <a:endParaRPr b="0" lang="en-US" sz="1200" spc="-1" strike="noStrike">
               <a:solidFill>
@@ -30045,7 +30045,7 @@
                 </a:solidFill>
                 <a:latin typeface="Calibri"/>
               </a:rPr>
-              <a:t>0g://log/alice/games</a:t>
+              <a:t>3</a:t>
             </a:r>
             <a:endParaRPr b="0" lang="en-US" sz="1200" spc="-1" strike="noStrike">
               <a:solidFill>
@@ -30098,7 +30098,7 @@
                 </a:solidFill>
                 <a:latin typeface="Calibri"/>
               </a:rPr>
-              <a:t>Link to full 0G Log of all game records</a:t>
+              <a:t>ERC-7857 token id of the agent iNFT (empty for human subnames)</a:t>
             </a:r>
             <a:endParaRPr b="0" lang="en-US" sz="1050" spc="-1" strike="noStrike">
               <a:solidFill>
@@ -30151,7 +30151,7 @@
                 </a:solidFill>
                 <a:latin typeface="Calibri"/>
               </a:rPr>
-              <a:t>PlayerSubnameRegistrar.sol issues names; KeeperHub writes text records post-match.</a:t>
+              <a:t>PlayerSubnameRegistrar.sol issues subnames via ENS NameWrapper on Sepolia; protocol-only setText for the 5 reserved keys.</a:t>
             </a:r>
             <a:endParaRPr b="0" lang="en-US" sz="1100" spc="-1" strike="noStrike">
               <a:solidFill>
@@ -30300,7 +30300,7 @@
                 </a:solidFill>
                 <a:latin typeface="Calibri"/>
               </a:rPr>
-              <a:t>SPONSOR SPOTLIGHT — 0G CHAIN &amp; STORAGE</a:t>
+              <a:t>SPONSOR SPOTLIGHT — 0G STORAGE &amp; COMPUTE</a:t>
             </a:r>
             <a:endParaRPr b="0" lang="en-US" sz="1100" spc="-1" strike="noStrike">
               <a:solidFill>
@@ -30353,7 +30353,7 @@
                 </a:solidFill>
                 <a:latin typeface="Calibri"/>
               </a:rPr>
-              <a:t>AI-native modular blockchain — chain + storage in one stack</a:t>
+              <a:t>AI-native decentralized storage + TEE-attested compute</a:t>
             </a:r>
             <a:endParaRPr b="0" lang="en-US" sz="2800" spc="-1" strike="noStrike">
               <a:solidFill>
@@ -30527,7 +30527,7 @@
                 </a:solidFill>
                 <a:latin typeface="Calibri"/>
               </a:rPr>
-              <a:t>0G Chain</a:t>
+              <a:t>0G Compute</a:t>
             </a:r>
             <a:endParaRPr b="0" lang="en-US" sz="1700" spc="-1" strike="noStrike">
               <a:solidFill>
@@ -30580,7 +30580,7 @@
                 </a:solidFill>
                 <a:latin typeface="Calibri"/>
               </a:rPr>
-              <a:t>EVM-compatible L1  ·  chainId 16602</a:t>
+              <a:t>TEE-attested inference network.</a:t>
             </a:r>
             <a:endParaRPr b="0" lang="en-US" sz="1200" spc="-1" strike="noStrike">
               <a:solidFill>
@@ -30602,7 +30602,7 @@
                 </a:solidFill>
                 <a:latin typeface="Calibri"/>
               </a:rPr>
-              <a:t>Fast finality, EVM Cancun opcodes.</a:t>
+              <a:t>Coach LLM: Qwen 2.5 7B chat completion.</a:t>
             </a:r>
             <a:endParaRPr b="0" lang="en-US" sz="1200" spc="-1" strike="noStrike">
               <a:solidFill>
@@ -30624,7 +30624,7 @@
                 </a:solidFill>
                 <a:latin typeface="Calibri"/>
               </a:rPr>
-              <a:t>Hosts MatchRegistry, AgentRegistry, EloMath, PlayerSubnameRegistrar.</a:t>
+              <a:t>Offline NN inference for agent value-net.</a:t>
             </a:r>
             <a:endParaRPr b="0" lang="en-US" sz="1200" spc="-1" strike="noStrike">
               <a:solidFill>
@@ -30646,7 +30646,7 @@
                 </a:solidFill>
                 <a:latin typeface="Calibri"/>
               </a:rPr>
-              <a:t>Verified on chainscan-galileo block explorer.</a:t>
+              <a:t>@0glabs/0g-serving-broker SDK; ledger pay-per-call.</a:t>
             </a:r>
             <a:endParaRPr b="0" lang="en-US" sz="1200" spc="-1" strike="noStrike">
               <a:solidFill>
@@ -31157,7 +31157,7 @@
                 </a:solidFill>
                 <a:latin typeface="Calibri"/>
               </a:rPr>
-              <a:t>rootHash returned by 0G Storage is committed in MatchRegistry.recordMatch — chain ⇔ storage in one atomic reference.</a:t>
+              <a:t>rootHash returned by 0G Storage is committed in MatchRegistry on Sepolia — chain ⇔ storage in one atomic reference.</a:t>
             </a:r>
             <a:endParaRPr b="0" lang="en-US" sz="1100" spc="-1" strike="noStrike">
               <a:solidFill>
@@ -31322,7 +31322,7 @@
                 </a:solidFill>
                 <a:latin typeface="Calibri"/>
               </a:rPr>
-              <a:t>gnubg neural-network weights (~408 KB) and per-agent experience overlays live in 0G Blob. 0G was built for exactly this.</a:t>
+              <a:t>gnubg starter weights and per-agent trained checkpoints (~10K params) live in 0G Blob. 0G was built for exactly this.</a:t>
             </a:r>
             <a:endParaRPr b="0" lang="en-US" sz="1100" spc="-1" strike="noStrike">
               <a:solidFill>
@@ -31652,7 +31652,7 @@
                 </a:solidFill>
                 <a:latin typeface="Calibri"/>
               </a:rPr>
-              <a:t>og-bridge wraps @0gfoundation/0g-ts-sdk. Same RPC for contracts and storage — no cross-chain bridging ceremony.</a:t>
+              <a:t>og-bridge wraps @0glabs/0g-ts-sdk for Storage; @0glabs/0g-serving-broker drives Compute via Next.js Route Handlers.</a:t>
             </a:r>
             <a:endParaRPr b="0" lang="en-US" sz="1100" spc="-1" strike="noStrike">
               <a:solidFill>
@@ -32552,7 +32552,7 @@
                 </a:solidFill>
                 <a:latin typeface="Calibri"/>
               </a:rPr>
-              <a:t>HTTP trigger</a:t>
+              <a:t>Event-driven trigger</a:t>
             </a:r>
             <a:endParaRPr b="0" lang="en-US" sz="1300" spc="-1" strike="noStrike">
               <a:solidFill>
@@ -32605,7 +32605,7 @@
                 </a:solidFill>
                 <a:latin typeface="Calibri"/>
               </a:rPr>
-              <a:t>Server calls POST /trigger after game ends</a:t>
+              <a:t>Fires on both MatchEscrow.Deposited events for matchId</a:t>
             </a:r>
             <a:endParaRPr b="0" lang="en-US" sz="1100" spc="-1" strike="noStrike">
               <a:solidFill>
@@ -32829,7 +32829,7 @@
                 </a:solidFill>
                 <a:latin typeface="Calibri"/>
               </a:rPr>
-              <a:t>recordMatch</a:t>
+              <a:t>recordMatchAndSplit</a:t>
             </a:r>
             <a:endParaRPr b="0" lang="en-US" sz="1300" spc="-1" strike="noStrike">
               <a:solidFill>
@@ -32882,7 +32882,7 @@
                 </a:solidFill>
                 <a:latin typeface="Calibri"/>
               </a:rPr>
-              <a:t>MatchRegistry.recordMatch(winner, loser, length, gameRecordHash) → emits EloUpdated</a:t>
+              <a:t>MatchRegistry.recordMatchAndSplit(...args, winners[], shares[]) → atomic settle + payout on Sepolia</a:t>
             </a:r>
             <a:endParaRPr b="0" lang="en-US" sz="1100" spc="-1" strike="noStrike">
               <a:solidFill>
@@ -33159,7 +33159,7 @@
                 </a:solidFill>
                 <a:latin typeface="Calibri"/>
               </a:rPr>
-              <a:t>setText on alice.chaingammon.eth and opponent: elo, match_count, last_match_id, archive_uri</a:t>
+              <a:t>setText on alice.chaingammon.eth and opponent: elo, match_count, last_match_id, kind, inft_id</a:t>
             </a:r>
             <a:endParaRPr b="0" lang="en-US" sz="1100" spc="-1" strike="noStrike">
               <a:solidFill>
@@ -33436,7 +33436,7 @@
                 </a:solidFill>
                 <a:latin typeface="Calibri"/>
               </a:rPr>
-              <a:t>AgentRegistry.updateOverlayHash(agentId, newHash) bumps experienceVersion</a:t>
+              <a:t>AgentRegistry.updateOverlayHash(agentId, newCheckpointHash) bumps experienceVersion</a:t>
             </a:r>
             <a:endParaRPr b="0" lang="en-US" sz="1100" spc="-1" strike="noStrike">
               <a:solidFill>
@@ -33766,7 +33766,7 @@
                 </a:solidFill>
                 <a:latin typeface="Calibri"/>
               </a:rPr>
-              <a:t>kh CLI defines the workflow YAML; the server only fires the trigger.</a:t>
+              <a:t>keeperhub/match-settle.yaml defines the 7-step event-driven workflow.</a:t>
             </a:r>
             <a:endParaRPr b="0" lang="en-US" sz="1100" spc="-1" strike="noStrike">
               <a:solidFill>
